--- a/Configurable_Static_Type_Checking_for_Forth_EuroForth_2026.pptx
+++ b/Configurable_Static_Type_Checking_for_Forth_EuroForth_2026.pptx
@@ -4119,45 +4119,6 @@
       </p:sp>
       <p:sp>
         <p:nvSpPr>
-          <p:cNvPr id="5" name="TextBox 4"/>
-          <p:cNvSpPr txBox="1"/>
-          <p:nvPr/>
-        </p:nvSpPr>
-        <p:spPr>
-          <a:xfrm>
-            <a:off x="11109960" y="429768"/>
-            <a:ext cx="502920" cy="274320"/>
-          </a:xfrm>
-          <a:prstGeom prst="rect">
-            <a:avLst/>
-          </a:prstGeom>
-          <a:noFill/>
-        </p:spPr>
-        <p:txBody>
-          <a:bodyPr wrap="square" lIns="0" tIns="0" rIns="0" bIns="0" anchor="t">
-            <a:spAutoFit/>
-          </a:bodyPr>
-          <a:lstStyle/>
-          <a:p>
-            <a:pPr algn="r">
-              <a:lnSpc>
-                <a:spcPct val="100000"/>
-              </a:lnSpc>
-            </a:pPr>
-            <a:r>
-              <a:rPr sz="1000" b="1" i="0">
-                <a:solidFill>
-                  <a:srgbClr val="9A3548"/>
-                </a:solidFill>
-                <a:latin typeface="Liberation Mono"/>
-              </a:rPr>
-              <a:t>14</a:t>
-            </a:r>
-          </a:p>
-        </p:txBody>
-      </p:sp>
-      <p:sp>
-        <p:nvSpPr>
           <p:cNvPr id="8" name="Rounded Rectangle 7"/>
           <p:cNvSpPr/>
           <p:nvPr/>
@@ -5316,45 +5277,6 @@
       </p:sp>
       <p:sp>
         <p:nvSpPr>
-          <p:cNvPr id="5" name="TextBox 4"/>
-          <p:cNvSpPr txBox="1"/>
-          <p:nvPr/>
-        </p:nvSpPr>
-        <p:spPr>
-          <a:xfrm>
-            <a:off x="11109960" y="429768"/>
-            <a:ext cx="502920" cy="274320"/>
-          </a:xfrm>
-          <a:prstGeom prst="rect">
-            <a:avLst/>
-          </a:prstGeom>
-          <a:noFill/>
-        </p:spPr>
-        <p:txBody>
-          <a:bodyPr wrap="square" lIns="0" tIns="0" rIns="0" bIns="0" anchor="t">
-            <a:spAutoFit/>
-          </a:bodyPr>
-          <a:lstStyle/>
-          <a:p>
-            <a:pPr algn="r">
-              <a:lnSpc>
-                <a:spcPct val="100000"/>
-              </a:lnSpc>
-            </a:pPr>
-            <a:r>
-              <a:rPr sz="1000" b="1" i="0">
-                <a:solidFill>
-                  <a:srgbClr val="9A3548"/>
-                </a:solidFill>
-                <a:latin typeface="Liberation Mono"/>
-              </a:rPr>
-              <a:t>15</a:t>
-            </a:r>
-          </a:p>
-        </p:txBody>
-      </p:sp>
-      <p:sp>
-        <p:nvSpPr>
           <p:cNvPr id="6" name="TextBox 5"/>
           <p:cNvSpPr txBox="1"/>
           <p:nvPr/>
@@ -6168,45 +6090,6 @@
       </p:sp>
       <p:sp>
         <p:nvSpPr>
-          <p:cNvPr id="5" name="TextBox 4"/>
-          <p:cNvSpPr txBox="1"/>
-          <p:nvPr/>
-        </p:nvSpPr>
-        <p:spPr>
-          <a:xfrm>
-            <a:off x="11109960" y="429768"/>
-            <a:ext cx="502920" cy="274320"/>
-          </a:xfrm>
-          <a:prstGeom prst="rect">
-            <a:avLst/>
-          </a:prstGeom>
-          <a:noFill/>
-        </p:spPr>
-        <p:txBody>
-          <a:bodyPr wrap="square" lIns="0" tIns="0" rIns="0" bIns="0" anchor="t">
-            <a:spAutoFit/>
-          </a:bodyPr>
-          <a:lstStyle/>
-          <a:p>
-            <a:pPr algn="r">
-              <a:lnSpc>
-                <a:spcPct val="100000"/>
-              </a:lnSpc>
-            </a:pPr>
-            <a:r>
-              <a:rPr sz="1000" b="1" i="0">
-                <a:solidFill>
-                  <a:srgbClr val="9A3548"/>
-                </a:solidFill>
-                <a:latin typeface="Liberation Mono"/>
-              </a:rPr>
-              <a:t>05</a:t>
-            </a:r>
-          </a:p>
-        </p:txBody>
-      </p:sp>
-      <p:sp>
-        <p:nvSpPr>
           <p:cNvPr id="6" name="TextBox 5"/>
           <p:cNvSpPr txBox="1"/>
           <p:nvPr/>
@@ -7399,45 +7282,6 @@
       </p:sp>
       <p:sp>
         <p:nvSpPr>
-          <p:cNvPr id="5" name="TextBox 4"/>
-          <p:cNvSpPr txBox="1"/>
-          <p:nvPr/>
-        </p:nvSpPr>
-        <p:spPr>
-          <a:xfrm>
-            <a:off x="11109960" y="429768"/>
-            <a:ext cx="502920" cy="274320"/>
-          </a:xfrm>
-          <a:prstGeom prst="rect">
-            <a:avLst/>
-          </a:prstGeom>
-          <a:noFill/>
-        </p:spPr>
-        <p:txBody>
-          <a:bodyPr wrap="square" lIns="0" tIns="0" rIns="0" bIns="0" anchor="t">
-            <a:spAutoFit/>
-          </a:bodyPr>
-          <a:lstStyle/>
-          <a:p>
-            <a:pPr algn="r">
-              <a:lnSpc>
-                <a:spcPct val="100000"/>
-              </a:lnSpc>
-            </a:pPr>
-            <a:r>
-              <a:rPr sz="1000" b="1" i="0">
-                <a:solidFill>
-                  <a:srgbClr val="9A3548"/>
-                </a:solidFill>
-                <a:latin typeface="Liberation Mono"/>
-              </a:rPr>
-              <a:t>03</a:t>
-            </a:r>
-          </a:p>
-        </p:txBody>
-      </p:sp>
-      <p:sp>
-        <p:nvSpPr>
           <p:cNvPr id="6" name="TextBox 5"/>
           <p:cNvSpPr txBox="1"/>
           <p:nvPr/>
@@ -8348,45 +8192,6 @@
       </p:sp>
       <p:sp>
         <p:nvSpPr>
-          <p:cNvPr id="5" name="TextBox 4"/>
-          <p:cNvSpPr txBox="1"/>
-          <p:nvPr/>
-        </p:nvSpPr>
-        <p:spPr>
-          <a:xfrm>
-            <a:off x="11109960" y="429768"/>
-            <a:ext cx="502920" cy="274320"/>
-          </a:xfrm>
-          <a:prstGeom prst="rect">
-            <a:avLst/>
-          </a:prstGeom>
-          <a:noFill/>
-        </p:spPr>
-        <p:txBody>
-          <a:bodyPr wrap="square" lIns="0" tIns="0" rIns="0" bIns="0" anchor="t">
-            <a:spAutoFit/>
-          </a:bodyPr>
-          <a:lstStyle/>
-          <a:p>
-            <a:pPr algn="r">
-              <a:lnSpc>
-                <a:spcPct val="100000"/>
-              </a:lnSpc>
-            </a:pPr>
-            <a:r>
-              <a:rPr sz="1000" b="1" i="0">
-                <a:solidFill>
-                  <a:srgbClr val="9A3548"/>
-                </a:solidFill>
-                <a:latin typeface="Liberation Mono"/>
-              </a:rPr>
-              <a:t>04</a:t>
-            </a:r>
-          </a:p>
-        </p:txBody>
-      </p:sp>
-      <p:sp>
-        <p:nvSpPr>
           <p:cNvPr id="6" name="TextBox 5"/>
           <p:cNvSpPr txBox="1"/>
           <p:nvPr/>
@@ -15298,45 +15103,6 @@
                 <a:latin typeface="Liberation Sans"/>
               </a:rPr>
               <a:t>and what it does not</a:t>
-            </a:r>
-          </a:p>
-        </p:txBody>
-      </p:sp>
-      <p:sp>
-        <p:nvSpPr>
-          <p:cNvPr id="5" name="TextBox 4"/>
-          <p:cNvSpPr txBox="1"/>
-          <p:nvPr/>
-        </p:nvSpPr>
-        <p:spPr>
-          <a:xfrm>
-            <a:off x="11109960" y="429768"/>
-            <a:ext cx="502920" cy="274320"/>
-          </a:xfrm>
-          <a:prstGeom prst="rect">
-            <a:avLst/>
-          </a:prstGeom>
-          <a:noFill/>
-        </p:spPr>
-        <p:txBody>
-          <a:bodyPr wrap="square" lIns="0" tIns="0" rIns="0" bIns="0" anchor="t">
-            <a:spAutoFit/>
-          </a:bodyPr>
-          <a:lstStyle/>
-          <a:p>
-            <a:pPr algn="r">
-              <a:lnSpc>
-                <a:spcPct val="100000"/>
-              </a:lnSpc>
-            </a:pPr>
-            <a:r>
-              <a:rPr sz="1000" b="1" i="0">
-                <a:solidFill>
-                  <a:srgbClr val="9A3548"/>
-                </a:solidFill>
-                <a:latin typeface="Liberation Mono"/>
-              </a:rPr>
-              <a:t>17</a:t>
             </a:r>
           </a:p>
         </p:txBody>
@@ -16059,60 +15825,6 @@
       </p:sp>
       <p:sp>
         <p:nvSpPr>
-          <p:cNvPr id="5" name="TextBox 4"/>
-          <p:cNvSpPr txBox="1"/>
-          <p:nvPr/>
-        </p:nvSpPr>
-        <p:spPr>
-          <a:xfrm>
-            <a:off x="11109960" y="429768"/>
-            <a:ext cx="502920" cy="153888"/>
-          </a:xfrm>
-          <a:prstGeom prst="rect">
-            <a:avLst/>
-          </a:prstGeom>
-          <a:noFill/>
-        </p:spPr>
-        <p:txBody>
-          <a:bodyPr wrap="square" lIns="0" tIns="0" rIns="0" bIns="0" anchor="t">
-            <a:spAutoFit/>
-          </a:bodyPr>
-          <a:lstStyle/>
-          <a:p>
-            <a:pPr algn="r">
-              <a:lnSpc>
-                <a:spcPct val="100000"/>
-              </a:lnSpc>
-            </a:pPr>
-            <a:r>
-              <a:rPr sz="1000" b="1" i="0" dirty="0">
-                <a:solidFill>
-                  <a:srgbClr val="9A3548"/>
-                </a:solidFill>
-                <a:latin typeface="Liberation Mono"/>
-              </a:rPr>
-              <a:t>1</a:t>
-            </a:r>
-            <a:r>
-              <a:rPr lang="et-EE" sz="1000" b="1" i="0" dirty="0">
-                <a:solidFill>
-                  <a:srgbClr val="9A3548"/>
-                </a:solidFill>
-                <a:latin typeface="Liberation Mono"/>
-              </a:rPr>
-              <a:t>6</a:t>
-            </a:r>
-            <a:endParaRPr sz="1000" b="1" i="0" dirty="0">
-              <a:solidFill>
-                <a:srgbClr val="9A3548"/>
-              </a:solidFill>
-              <a:latin typeface="Liberation Mono"/>
-            </a:endParaRPr>
-          </a:p>
-        </p:txBody>
-      </p:sp>
-      <p:sp>
-        <p:nvSpPr>
           <p:cNvPr id="6" name="TextBox 5"/>
           <p:cNvSpPr txBox="1"/>
           <p:nvPr/>
@@ -16146,45 +15858,6 @@
                 <a:latin typeface="Liberation Sans"/>
               </a:rPr>
               <a:t>CONFIGURABLE TYPE CHECKING FOR FORTH</a:t>
-            </a:r>
-          </a:p>
-        </p:txBody>
-      </p:sp>
-      <p:sp>
-        <p:nvSpPr>
-          <p:cNvPr id="7" name="TextBox 6"/>
-          <p:cNvSpPr txBox="1"/>
-          <p:nvPr/>
-        </p:nvSpPr>
-        <p:spPr>
-          <a:xfrm>
-            <a:off x="11247120" y="6565392"/>
-            <a:ext cx="365760" cy="164592"/>
-          </a:xfrm>
-          <a:prstGeom prst="rect">
-            <a:avLst/>
-          </a:prstGeom>
-          <a:noFill/>
-        </p:spPr>
-        <p:txBody>
-          <a:bodyPr wrap="square" lIns="0" tIns="0" rIns="0" bIns="0" anchor="t">
-            <a:spAutoFit/>
-          </a:bodyPr>
-          <a:lstStyle/>
-          <a:p>
-            <a:pPr algn="r">
-              <a:lnSpc>
-                <a:spcPct val="100000"/>
-              </a:lnSpc>
-            </a:pPr>
-            <a:r>
-              <a:rPr sz="800" b="1" i="0">
-                <a:solidFill>
-                  <a:srgbClr val="5E6B73"/>
-                </a:solidFill>
-                <a:latin typeface="Liberation Sans"/>
-              </a:rPr>
-              <a:t>18</a:t>
             </a:r>
           </a:p>
         </p:txBody>
@@ -17699,45 +17372,6 @@
                 <a:latin typeface="Liberation Sans"/>
               </a:rPr>
               <a:t>From an informal comment to a checkable contract</a:t>
-            </a:r>
-          </a:p>
-        </p:txBody>
-      </p:sp>
-      <p:sp>
-        <p:nvSpPr>
-          <p:cNvPr id="5" name="TextBox 4"/>
-          <p:cNvSpPr txBox="1"/>
-          <p:nvPr/>
-        </p:nvSpPr>
-        <p:spPr>
-          <a:xfrm>
-            <a:off x="11109960" y="429768"/>
-            <a:ext cx="502920" cy="274320"/>
-          </a:xfrm>
-          <a:prstGeom prst="rect">
-            <a:avLst/>
-          </a:prstGeom>
-          <a:noFill/>
-        </p:spPr>
-        <p:txBody>
-          <a:bodyPr wrap="square" lIns="0" tIns="0" rIns="0" bIns="0" anchor="t">
-            <a:spAutoFit/>
-          </a:bodyPr>
-          <a:lstStyle/>
-          <a:p>
-            <a:pPr algn="r">
-              <a:lnSpc>
-                <a:spcPct val="100000"/>
-              </a:lnSpc>
-            </a:pPr>
-            <a:r>
-              <a:rPr sz="1000" b="1" i="0">
-                <a:solidFill>
-                  <a:srgbClr val="9A3548"/>
-                </a:solidFill>
-                <a:latin typeface="Liberation Mono"/>
-              </a:rPr>
-              <a:t>03</a:t>
             </a:r>
           </a:p>
         </p:txBody>
@@ -18803,45 +18437,6 @@
       </p:sp>
       <p:sp>
         <p:nvSpPr>
-          <p:cNvPr id="5" name="TextBox 4"/>
-          <p:cNvSpPr txBox="1"/>
-          <p:nvPr/>
-        </p:nvSpPr>
-        <p:spPr>
-          <a:xfrm>
-            <a:off x="11109960" y="429768"/>
-            <a:ext cx="502920" cy="274320"/>
-          </a:xfrm>
-          <a:prstGeom prst="rect">
-            <a:avLst/>
-          </a:prstGeom>
-          <a:noFill/>
-        </p:spPr>
-        <p:txBody>
-          <a:bodyPr wrap="square" lIns="0" tIns="0" rIns="0" bIns="0" anchor="t">
-            <a:spAutoFit/>
-          </a:bodyPr>
-          <a:lstStyle/>
-          <a:p>
-            <a:pPr algn="r">
-              <a:lnSpc>
-                <a:spcPct val="100000"/>
-              </a:lnSpc>
-            </a:pPr>
-            <a:r>
-              <a:rPr sz="1000" b="1" i="0">
-                <a:solidFill>
-                  <a:srgbClr val="9A3548"/>
-                </a:solidFill>
-                <a:latin typeface="Liberation Mono"/>
-              </a:rPr>
-              <a:t>06</a:t>
-            </a:r>
-          </a:p>
-        </p:txBody>
-      </p:sp>
-      <p:sp>
-        <p:nvSpPr>
           <p:cNvPr id="6" name="TextBox 5"/>
           <p:cNvSpPr txBox="1"/>
           <p:nvPr/>
@@ -20459,45 +20054,6 @@
       </p:sp>
       <p:sp>
         <p:nvSpPr>
-          <p:cNvPr id="5" name="TextBox 4"/>
-          <p:cNvSpPr txBox="1"/>
-          <p:nvPr/>
-        </p:nvSpPr>
-        <p:spPr>
-          <a:xfrm>
-            <a:off x="11109960" y="429768"/>
-            <a:ext cx="502920" cy="274320"/>
-          </a:xfrm>
-          <a:prstGeom prst="rect">
-            <a:avLst/>
-          </a:prstGeom>
-          <a:noFill/>
-        </p:spPr>
-        <p:txBody>
-          <a:bodyPr wrap="square" lIns="0" tIns="0" rIns="0" bIns="0" anchor="t">
-            <a:spAutoFit/>
-          </a:bodyPr>
-          <a:lstStyle/>
-          <a:p>
-            <a:pPr algn="r">
-              <a:lnSpc>
-                <a:spcPct val="100000"/>
-              </a:lnSpc>
-            </a:pPr>
-            <a:r>
-              <a:rPr sz="1000" b="1" i="0">
-                <a:solidFill>
-                  <a:srgbClr val="9A3548"/>
-                </a:solidFill>
-                <a:latin typeface="Liberation Mono"/>
-              </a:rPr>
-              <a:t>11</a:t>
-            </a:r>
-          </a:p>
-        </p:txBody>
-      </p:sp>
-      <p:sp>
-        <p:nvSpPr>
           <p:cNvPr id="8" name="Rounded Rectangle 7"/>
           <p:cNvSpPr/>
           <p:nvPr/>
@@ -21954,45 +21510,6 @@
       </p:sp>
       <p:sp>
         <p:nvSpPr>
-          <p:cNvPr id="5" name="TextBox 4"/>
-          <p:cNvSpPr txBox="1"/>
-          <p:nvPr/>
-        </p:nvSpPr>
-        <p:spPr>
-          <a:xfrm>
-            <a:off x="11109960" y="429768"/>
-            <a:ext cx="502920" cy="274320"/>
-          </a:xfrm>
-          <a:prstGeom prst="rect">
-            <a:avLst/>
-          </a:prstGeom>
-          <a:noFill/>
-        </p:spPr>
-        <p:txBody>
-          <a:bodyPr wrap="square" lIns="0" tIns="0" rIns="0" bIns="0" anchor="t">
-            <a:spAutoFit/>
-          </a:bodyPr>
-          <a:lstStyle/>
-          <a:p>
-            <a:pPr algn="r">
-              <a:lnSpc>
-                <a:spcPct val="100000"/>
-              </a:lnSpc>
-            </a:pPr>
-            <a:r>
-              <a:rPr sz="1000" b="1" i="0">
-                <a:solidFill>
-                  <a:srgbClr val="9A3548"/>
-                </a:solidFill>
-                <a:latin typeface="Liberation Mono"/>
-              </a:rPr>
-              <a:t>07</a:t>
-            </a:r>
-          </a:p>
-        </p:txBody>
-      </p:sp>
-      <p:sp>
-        <p:nvSpPr>
           <p:cNvPr id="8" name="Rounded Rectangle 7"/>
           <p:cNvSpPr/>
           <p:nvPr/>
@@ -23052,45 +22569,6 @@
       </p:sp>
       <p:sp>
         <p:nvSpPr>
-          <p:cNvPr id="5" name="TextBox 4"/>
-          <p:cNvSpPr txBox="1"/>
-          <p:nvPr/>
-        </p:nvSpPr>
-        <p:spPr>
-          <a:xfrm>
-            <a:off x="11109960" y="429768"/>
-            <a:ext cx="502920" cy="274320"/>
-          </a:xfrm>
-          <a:prstGeom prst="rect">
-            <a:avLst/>
-          </a:prstGeom>
-          <a:noFill/>
-        </p:spPr>
-        <p:txBody>
-          <a:bodyPr wrap="square" lIns="0" tIns="0" rIns="0" bIns="0" anchor="t">
-            <a:spAutoFit/>
-          </a:bodyPr>
-          <a:lstStyle/>
-          <a:p>
-            <a:pPr algn="r">
-              <a:lnSpc>
-                <a:spcPct val="100000"/>
-              </a:lnSpc>
-            </a:pPr>
-            <a:r>
-              <a:rPr sz="1000" b="1" i="0">
-                <a:solidFill>
-                  <a:srgbClr val="9A3548"/>
-                </a:solidFill>
-                <a:latin typeface="Liberation Mono"/>
-              </a:rPr>
-              <a:t>08</a:t>
-            </a:r>
-          </a:p>
-        </p:txBody>
-      </p:sp>
-      <p:sp>
-        <p:nvSpPr>
           <p:cNvPr id="8" name="Rounded Rectangle 7"/>
           <p:cNvSpPr/>
           <p:nvPr/>
@@ -24367,45 +23845,6 @@
               </a:solidFill>
               <a:latin typeface="Liberation Sans"/>
             </a:endParaRPr>
-          </a:p>
-        </p:txBody>
-      </p:sp>
-      <p:sp>
-        <p:nvSpPr>
-          <p:cNvPr id="5" name="TextBox 4"/>
-          <p:cNvSpPr txBox="1"/>
-          <p:nvPr/>
-        </p:nvSpPr>
-        <p:spPr>
-          <a:xfrm>
-            <a:off x="11109960" y="429768"/>
-            <a:ext cx="502920" cy="274320"/>
-          </a:xfrm>
-          <a:prstGeom prst="rect">
-            <a:avLst/>
-          </a:prstGeom>
-          <a:noFill/>
-        </p:spPr>
-        <p:txBody>
-          <a:bodyPr wrap="square" lIns="0" tIns="0" rIns="0" bIns="0" anchor="t">
-            <a:spAutoFit/>
-          </a:bodyPr>
-          <a:lstStyle/>
-          <a:p>
-            <a:pPr algn="r">
-              <a:lnSpc>
-                <a:spcPct val="100000"/>
-              </a:lnSpc>
-            </a:pPr>
-            <a:r>
-              <a:rPr sz="1000" b="1" i="0">
-                <a:solidFill>
-                  <a:srgbClr val="9A3548"/>
-                </a:solidFill>
-                <a:latin typeface="Liberation Mono"/>
-              </a:rPr>
-              <a:t>09</a:t>
-            </a:r>
           </a:p>
         </p:txBody>
       </p:sp>
